--- a/docs/NAPCO-Nucleus-Requirement-Management.pptx
+++ b/docs/NAPCO-Nucleus-Requirement-Management.pptx
@@ -1004,7 +1004,7 @@
           <a:lstStyle/>
           <a:p>
             <a:r>
-              <a:t>Two channels live on each dev machine (chat + calls). Two run centrally on the agent host (email + Drive). Important: dev machines never need any Gmail or Drive credentials. Those live on the agent host, owned by me.</a:t>
+              <a:t>All four channels stage to central in the background -- nothing to remember. Chat + calls on each dev's PC are gated to the BD evening window (18:00-01:00); a once-daily 18:00 backfill sweeps any daytime chat so nothing is lost. Email + Drive run 24x7 from the agent host (offset by 5 min to avoid API contention). Dev machines never hold Gmail or Drive credentials -- those live on the agent host. The Requirement Management workflow reads from the central store when I'm ready to draft.</a:t>
             </a:r>
           </a:p>
         </p:txBody>
@@ -1214,7 +1214,7 @@
           <a:lstStyle/>
           <a:p>
             <a:r>
-              <a:t>One command. The window can be 30 min for a quick check, or 2880 min (48 hours) to sweep up everything since yesterday. The pipeline takes a couple of minutes if there are no calls; longer with Whisper transcription. The output is a draft email in my Gmail. I read it, edit it, send it -- or don't send it.</a:t>
+              <a:t>One workflow. Two triggers, same code path: the GitHub Actions "Requirement Management" workflow on the self-hosted runner, or scripts\requirement-management.bat on my own machine. Email + Drive are already on central (auto-staged every 15 min), so the workflow just walks what's there, transcribes new calls, and asks Claude to identify + draft. Output is one verification email in [Gmail]/Drafts -- I read it, edit it, send it, or skip it.</a:t>
             </a:r>
           </a:p>
         </p:txBody>
@@ -5513,7 +5513,7 @@
                 </a:solidFill>
                 <a:latin typeface="Calibri"/>
               </a:rPr>
-              <a:t>Each "do_it_now" run produces a draft I review</a:t>
+              <a:t>Each Requirement Management run produces a draft I review. Calibration loop, conflict detection, per-run cost telemetry are in.</a:t>
             </a:r>
           </a:p>
           <a:p>
@@ -5529,7 +5529,7 @@
                 </a:solidFill>
                 <a:latin typeface="Calibri"/>
               </a:rPr>
-              <a:t>Manual, predictable, auditable.</a:t>
+              <a:t>Manual, predictable, auditable. Cost ~$0.06/run.</a:t>
             </a:r>
           </a:p>
         </p:txBody>
@@ -8357,7 +8357,7 @@
                 </a:solidFill>
                 <a:latin typeface="Calibri"/>
               </a:rPr>
-              <a:t>What we collect, where it comes from.</a:t>
+              <a:t>All four stage to central automatically. No operator action.</a:t>
             </a:r>
           </a:p>
         </p:txBody>
@@ -8571,7 +8571,7 @@
                 </a:solidFill>
                 <a:latin typeface="Calibri"/>
               </a:rPr>
-              <a:t>Group chats, DMs -- any conversation that is open in Teams.</a:t>
+              <a:t>Every 15 min during BD 18:00-01:00 + 18:00 backfill (1080 min).</a:t>
             </a:r>
           </a:p>
         </p:txBody>
@@ -8742,7 +8742,7 @@
                 </a:solidFill>
                 <a:latin typeface="Calibri"/>
               </a:rPr>
-              <a:t>Transcribed centrally with Whisper large-v3 (Bangla -&gt; English).</a:t>
+              <a:t>On "stop" / "Allah Hafez". Gated to BD 18:00-01:00.</a:t>
             </a:r>
           </a:p>
         </p:txBody>
@@ -8881,7 +8881,7 @@
                 </a:solidFill>
                 <a:latin typeface="Calibri"/>
               </a:rPr>
-              <a:t>IMAP pull from khasan@ael-bd.com. Body + attachments.</a:t>
+              <a:t>IMAP poll of khasan@ael-bd.com on the agent host.</a:t>
             </a:r>
           </a:p>
           <a:p>
@@ -8913,7 +8913,7 @@
                 </a:solidFill>
                 <a:latin typeface="Calibri"/>
               </a:rPr>
-              <a:t>PDF, DOCX, DOC, XLSX, XLS, TXT -- all extracted to text.</a:t>
+              <a:t>Auto-staged to central every 15 min, 24x7. UID-checkpointed.</a:t>
             </a:r>
           </a:p>
         </p:txBody>
@@ -9084,7 +9084,7 @@
                 </a:solidFill>
                 <a:latin typeface="Calibri"/>
               </a:rPr>
-              <a:t>Same attachment types as email, plus audio (Groq Whisper).</a:t>
+              <a:t>Auto-staged to central every 15 min, 24x7, +5 min offset.</a:t>
             </a:r>
           </a:p>
         </p:txBody>
@@ -10676,13 +10676,13 @@
           <a:p>
             <a:pPr algn="l"/>
             <a:r>
-              <a:rPr sz="2200" b="1">
+              <a:rPr sz="1800" b="1">
                 <a:solidFill>
                   <a:srgbClr val="FFFFFF"/>
                 </a:solidFill>
                 <a:latin typeface="Consolas"/>
               </a:rPr>
-              <a:t>py -3 do_it_now.py --client "Acme" --last-minutes 60</a:t>
+              <a:t>GHA: Run workflow "Requirement Management"   or   scripts\requirement-management.bat</a:t>
             </a:r>
           </a:p>
         </p:txBody>
@@ -10769,7 +10769,7 @@
                 </a:solidFill>
                 <a:latin typeface="Calibri"/>
               </a:rPr>
-              <a:t>Push my local Teams chat to central</a:t>
+              <a:t>Push my local Teams chat to central (force-flush)</a:t>
             </a:r>
           </a:p>
         </p:txBody>
@@ -10856,7 +10856,7 @@
                 </a:solidFill>
                 <a:latin typeface="Calibri"/>
               </a:rPr>
-              <a:t>SSH to the agent host (MVPACCESS)</a:t>
+              <a:t>Walk central: chat + calls + already-staged email + Drive</a:t>
             </a:r>
           </a:p>
         </p:txBody>
@@ -10943,7 +10943,7 @@
                 </a:solidFill>
                 <a:latin typeface="Calibri"/>
               </a:rPr>
-              <a:t>Pull email + Drive fresh on the agent host</a:t>
+              <a:t>Transcribe every new call (Whisper chunked, parallel)</a:t>
             </a:r>
           </a:p>
         </p:txBody>
@@ -11030,7 +11030,7 @@
                 </a:solidFill>
                 <a:latin typeface="Calibri"/>
               </a:rPr>
-              <a:t>Walk central, transcribe all calls, aggregate chats</a:t>
+              <a:t>Bangla -&gt; English happens inline at identify time</a:t>
             </a:r>
           </a:p>
         </p:txBody>
@@ -11117,7 +11117,7 @@
                 </a:solidFill>
                 <a:latin typeface="Calibri"/>
               </a:rPr>
-              <a:t>Run Claude -&gt; extract requirements -&gt; draft email</a:t>
+              <a:t>Claude extracts requirements -&gt; drafts verification email</a:t>
             </a:r>
           </a:p>
         </p:txBody>
@@ -11204,7 +11204,7 @@
                 </a:solidFill>
                 <a:latin typeface="Calibri"/>
               </a:rPr>
-              <a:t>Push the draft into [Gmail]/Drafts for me to review</a:t>
+              <a:t>Draft lands in [Gmail]/Drafts for me to review and send</a:t>
             </a:r>
           </a:p>
         </p:txBody>

--- a/docs/NAPCO-Nucleus-Requirement-Management.pptx
+++ b/docs/NAPCO-Nucleus-Requirement-Management.pptx
@@ -584,7 +584,7 @@
           <a:lstStyle/>
           <a:p>
             <a:r>
-              <a:t>Worth being explicit about boundaries so expectations are right. This system isn't trying to replace anyone or anything. It is a capture aid that I drive.</a:t>
+              <a:t>Worth being explicit about boundaries so expectations are right. Capture is fully automated -- chat, calls, email, and Drive all stage themselves. Identify + draft also runs on its own once daily at 23:45 BD. The one thing that stays manual is the send click: every email that goes to a client leaves my mailbox because I clicked Send. That's the human-in-the-loop boundary, and it stays there until the requirements doc is &gt;=80% accurate month after month. This is a capture aid that I drive at the final step.</a:t>
             </a:r>
           </a:p>
         </p:txBody>
@@ -1004,7 +1004,7 @@
           <a:lstStyle/>
           <a:p>
             <a:r>
-              <a:t>All four channels stage to central in the background -- nothing to remember. Chat + calls on each dev's PC are gated to the BD evening window (18:00-01:00); a once-daily 18:00 backfill sweeps any daytime chat so nothing is lost. Email + Drive run 24x7 from the agent host (offset by 5 min to avoid API contention). Dev machines never hold Gmail or Drive credentials -- those live on the agent host. The Requirement Management workflow reads from the central store when I'm ready to draft.</a:t>
+              <a:t>All four channels stage to central in the background -- nothing to remember. Chat push runs on three BD-local schedules (Day every 2 hr 10:00-17:00, Transition once at 17:30, Evening every 30 min 18:00-24:00) with an overnight gap that can be swept manually if needed. Teams calls record automatically the moment Teams opens its audio session -- no phrases to remember, though the verbal-trigger fallback is still armed. Email + Drive run 24x7 from the central host (offset by 5 min to avoid API contention). Dev machines never hold Gmail or Drive credentials -- those live on the central host. The Requirement Management workflow reads from the central store when I'm ready to draft.</a:t>
             </a:r>
           </a:p>
         </p:txBody>
@@ -1074,7 +1074,7 @@
           <a:lstStyle/>
           <a:p>
             <a:r>
-              <a:t>I have a PDF that goes through every step in detail. The two things to keep an eye on: register the cron with admin PowerShell -- it's a one-line script -- and leave the voice daemon running. Otherwise calls won't get captured.</a:t>
+              <a:t>The Developer Setup PDF in docs/ goes through every step in detail. The two things to remember: run the chat-push registration in admin PowerShell so the three scheduled tasks land, and use install-voice-daemon.bat -- it registers a Scheduled Task that re-launches the daemon at every logon and restarts it on crash. Recordings happen automatically the moment Teams opens an audio session; no buttons, no phrases.</a:t>
             </a:r>
           </a:p>
         </p:txBody>
@@ -1144,7 +1144,7 @@
           <a:lstStyle/>
           <a:p>
             <a:r>
-              <a:t>I want everyone to internalise: you don't run any command during the day. Your machine pushes chat every 15 minutes; the voice daemon listens for the start / stop phrases; downloads land in ~/Downloads automatically when you click. That's it.</a:t>
+              <a:t>I want everyone to internalise: you don't run any command during the day. Your machine pushes chat on its three BD-time schedules; the voice daemon auto-records the second Teams opens an audio session -- nothing to say, nothing to press; downloads land in ~/Downloads automatically when you click. That's it.</a:t>
             </a:r>
           </a:p>
         </p:txBody>
@@ -1284,7 +1284,7 @@
           <a:lstStyle/>
           <a:p>
             <a:r>
-              <a:t>Three responsibilities, three machines / processes. Dev machines push -- only push. Agent host pulls and aggregates. LLM identifies and drafts. Each layer has the smallest permissions it needs.</a:t>
+              <a:t>Three responsibilities. Dev machines push -- only push -- to the central Samba share on .123. The Linux central host runs a docker-compose stack that pulls email + Drive on its own cadence and transcribes new calls within ~2 minutes of arrival. The LLM identify + draft step runs once daily at 23:45 BD inside a container, and also on demand whenever I trigger it. Each layer holds the smallest permissions it needs -- dev PCs have no Gmail or Drive credentials at all.</a:t>
             </a:r>
           </a:p>
         </p:txBody>
@@ -4809,7 +4809,7 @@
                 </a:solidFill>
                 <a:latin typeface="Calibri"/>
               </a:rPr>
-              <a:t>Every outbound email leaves my mailbox with my explicit click.</a:t>
+              <a:t>Every outbound email leaves my mailbox with my explicit click. This is the hard boundary.</a:t>
             </a:r>
           </a:p>
         </p:txBody>
@@ -4932,7 +4932,7 @@
                 </a:solidFill>
                 <a:latin typeface="Calibri"/>
               </a:rPr>
-              <a:t>Auto-poll Teams / Email / Drive</a:t>
+              <a:t>Auto-edit the requirements doc</a:t>
             </a:r>
           </a:p>
           <a:p>
@@ -4948,7 +4948,7 @@
                 </a:solidFill>
                 <a:latin typeface="Calibri"/>
               </a:rPr>
-              <a:t>The 15-min cron is a chat-push only; the identify pipeline runs on command.</a:t>
+              <a:t>The .docx draft is final until I edit it. The LLM does not rewrite it on its own.</a:t>
             </a:r>
           </a:p>
         </p:txBody>
@@ -8571,7 +8571,7 @@
                 </a:solidFill>
                 <a:latin typeface="Calibri"/>
               </a:rPr>
-              <a:t>Every 15 min during BD 18:00-01:00 + 18:00 backfill (1080 min).</a:t>
+              <a:t>Day every 2 hr, Transition 17:30, Evening every 30 min. 24x7 with overnight gap.</a:t>
             </a:r>
           </a:p>
         </p:txBody>
@@ -8742,7 +8742,7 @@
                 </a:solidFill>
                 <a:latin typeface="Calibri"/>
               </a:rPr>
-              <a:t>On "stop" / "Allah Hafez". Gated to BD 18:00-01:00.</a:t>
+              <a:t>Auto on Teams audio-session edges, 24x7. Phrase trigger armed as fallback.</a:t>
             </a:r>
           </a:p>
         </p:txBody>
@@ -8881,7 +8881,7 @@
                 </a:solidFill>
                 <a:latin typeface="Calibri"/>
               </a:rPr>
-              <a:t>IMAP poll of khasan@ael-bd.com on the agent host.</a:t>
+              <a:t>IMAP poll of khasan@ael-bd.com on the central host.</a:t>
             </a:r>
           </a:p>
           <a:p>
@@ -9548,7 +9548,7 @@
                 </a:solidFill>
                 <a:latin typeface="Calibri"/>
               </a:rPr>
-              <a:t>NUCLEUS_CENTRAL_PATH=\\172.16.205.209\nucleus-central</a:t>
+              <a:t>NUCLEUS_CENTRAL_PATH=\\172.16.205.123\nucleus-central</a:t>
             </a:r>
           </a:p>
         </p:txBody>
@@ -9635,7 +9635,7 @@
                 </a:solidFill>
                 <a:latin typeface="Calibri"/>
               </a:rPr>
-              <a:t>Register the 15-min chat-push</a:t>
+              <a:t>Register the chat-push tasks (Day / Transition / Evening)</a:t>
             </a:r>
           </a:p>
           <a:p>
@@ -9651,7 +9651,7 @@
                 </a:solidFill>
                 <a:latin typeface="Calibri"/>
               </a:rPr>
-              <a:t>.\scripts\register-chat-push-task.ps1</a:t>
+              <a:t>.\scripts\register-chat-push-task.ps1  (admin PowerShell)</a:t>
             </a:r>
           </a:p>
         </p:txBody>
@@ -9738,7 +9738,7 @@
                 </a:solidFill>
                 <a:latin typeface="Calibri"/>
               </a:rPr>
-              <a:t>Start the voice daemon</a:t>
+              <a:t>Install the voice daemon (autostarts at logon)</a:t>
             </a:r>
           </a:p>
           <a:p>
@@ -9754,7 +9754,7 @@
                 </a:solidFill>
                 <a:latin typeface="Calibri"/>
               </a:rPr>
-              <a:t>Double-click scripts\start-daemon.bat</a:t>
+              <a:t>Double-click scripts\install-voice-daemon.bat</a:t>
             </a:r>
           </a:p>
         </p:txBody>
@@ -10104,7 +10104,7 @@
                 </a:solidFill>
                 <a:latin typeface="Calibri"/>
               </a:rPr>
-              <a:t>Nothing -- the 15-minute cron handles it</a:t>
+              <a:t>Nothing -- the chat-push tasks (Day / Transition / Evening) handle it</a:t>
             </a:r>
           </a:p>
         </p:txBody>
@@ -10219,7 +10219,7 @@
                 </a:solidFill>
                 <a:latin typeface="Calibri"/>
               </a:rPr>
-              <a:t>Say "Start recording" when the call begins, "Stop" when it ends</a:t>
+              <a:t>Nothing -- recording auto-starts when Teams opens its audio session</a:t>
             </a:r>
           </a:p>
         </p:txBody>
@@ -11316,7 +11316,7 @@
                 </a:solidFill>
                 <a:latin typeface="Calibri"/>
               </a:rPr>
-              <a:t>Per-dev push + agent-host central pull + LLM identify.</a:t>
+              <a:t>Per-dev push + Linux central pull + LLM identify.</a:t>
             </a:r>
           </a:p>
         </p:txBody>
@@ -11514,7 +11514,7 @@
                 </a:solidFill>
                 <a:latin typeface="Calibri"/>
               </a:rPr>
-              <a:t>15-min cron pushes chat + attachments</a:t>
+              <a:t>Chat-push tasks (Day / Transition / Evening)</a:t>
             </a:r>
           </a:p>
           <a:p>
@@ -11530,7 +11530,7 @@
                 </a:solidFill>
                 <a:latin typeface="Calibri"/>
               </a:rPr>
-              <a:t>Voice daemon records calls</a:t>
+              <a:t>Voice daemon auto-records Teams calls</a:t>
             </a:r>
           </a:p>
           <a:p>
@@ -11546,7 +11546,7 @@
                 </a:solidFill>
                 <a:latin typeface="Calibri"/>
               </a:rPr>
-              <a:t>Writes to \\172.16.205.209\nucleus-central</a:t>
+              <a:t>Writes to \\172.16.205.123\nucleus-central</a:t>
             </a:r>
           </a:p>
           <a:p>
@@ -11685,7 +11685,7 @@
                 </a:solidFill>
                 <a:latin typeface="Calibri"/>
               </a:rPr>
-              <a:t>Agent host (MVPACCESS)</a:t>
+              <a:t>Central host (.123, Linux)</a:t>
             </a:r>
           </a:p>
           <a:p>
@@ -11701,7 +11701,7 @@
                 </a:solidFill>
                 <a:latin typeface="Calibri"/>
               </a:rPr>
-              <a:t>Pulls email from Gmail (IMAP)</a:t>
+              <a:t>docker-compose: 6 services, always on</a:t>
             </a:r>
           </a:p>
           <a:p>
@@ -11717,7 +11717,7 @@
                 </a:solidFill>
                 <a:latin typeface="Calibri"/>
               </a:rPr>
-              <a:t>Pulls files from Google Drive</a:t>
+              <a:t>Pulls email (IMAP) + Drive every 15 min</a:t>
             </a:r>
           </a:p>
           <a:p>
@@ -11733,7 +11733,7 @@
                 </a:solidFill>
                 <a:latin typeface="Calibri"/>
               </a:rPr>
-              <a:t>Walks the central share daily</a:t>
+              <a:t>Auto-transcribes new calls (~2 min lag)</a:t>
             </a:r>
           </a:p>
           <a:p>
@@ -11749,7 +11749,7 @@
                 </a:solidFill>
                 <a:latin typeface="Calibri"/>
               </a:rPr>
-              <a:t>Transcribes calls with Whisper large-v3</a:t>
+              <a:t>Groq whisper-large-v3 with chunking;</a:t>
             </a:r>
           </a:p>
           <a:p>
@@ -11765,7 +11765,7 @@
                 </a:solidFill>
                 <a:latin typeface="Calibri"/>
               </a:rPr>
-              <a:t>Aggregates into one .docx session</a:t>
+              <a:t>faster-whisper fallback</a:t>
             </a:r>
           </a:p>
         </p:txBody>
@@ -11904,7 +11904,7 @@
                 </a:solidFill>
                 <a:latin typeface="Calibri"/>
               </a:rPr>
-              <a:t>Claude Max -- local CLI on MVPACCESS</a:t>
+              <a:t>Claude CLI in nucleus-daily-draft container</a:t>
             </a:r>
           </a:p>
           <a:p>
@@ -11920,7 +11920,7 @@
                 </a:solidFill>
                 <a:latin typeface="Calibri"/>
               </a:rPr>
-              <a:t>Extracts deduped requirement list</a:t>
+              <a:t>Auto-fires 23:45 BD daily; on-demand too</a:t>
             </a:r>
           </a:p>
           <a:p>
@@ -11936,7 +11936,7 @@
                 </a:solidFill>
                 <a:latin typeface="Calibri"/>
               </a:rPr>
-              <a:t>Writes Requirements Verification .docx</a:t>
+              <a:t>Extracts deduped requirement list</a:t>
             </a:r>
           </a:p>
           <a:p>
@@ -11952,7 +11952,7 @@
                 </a:solidFill>
                 <a:latin typeface="Calibri"/>
               </a:rPr>
-              <a:t>Builds verification email .eml</a:t>
+              <a:t>Writes Requirements Verification .docx</a:t>
             </a:r>
           </a:p>
           <a:p>
@@ -11968,7 +11968,7 @@
                 </a:solidFill>
                 <a:latin typeface="Calibri"/>
               </a:rPr>
-              <a:t>IMAP APPEND to [Gmail]/Drafts</a:t>
+              <a:t>IMAP APPEND to Titu's [Gmail]/Drafts</a:t>
             </a:r>
           </a:p>
         </p:txBody>
